--- a/dist/초3/국어/읽기와어휘/초3_국어_읽기와어휘_01_문단의중심문장_학생용.pptx
+++ b/dist/초3/국어/읽기와어휘/초3_국어_읽기와어휘_01_문단의중심문장_학생용.pptx
@@ -118,38 +118,38 @@
   <p:extLst>
     <p:ext uri="{521415D9-36F7-43E2-AB2F-B90AF26B5E84}">
       <p14:sectionLst xmlns:p14="http://schemas.microsoft.com/office/powerpoint/2010/main">
-        <p14:section name="도입" id="{d7c50c4a-1b74-8956-c954-32d0f4369a0c}">
+        <p14:section name="도입" id="{7570f434-a0b9-2eac-727f-864903b6e9ff}">
           <p14:sldIdLst>
             <p14:sldId id="256"/>
             <p14:sldId id="257"/>
           </p14:sldIdLst>
         </p14:section>
-        <p14:section name="개념" id="{c4ade833-6f6b-3676-af69-e4c2489215a8}">
+        <p14:section name="개념" id="{e20d0d5f-3fb4-2db0-9197-50038d768137}">
           <p14:sldIdLst>
             <p14:sldId id="258"/>
             <p14:sldId id="259"/>
             <p14:sldId id="260"/>
           </p14:sldIdLst>
         </p14:section>
-        <p14:section name="연습" id="{6195d977-6b30-4ab3-37de-d8a370d0b343}">
+        <p14:section name="연습" id="{ce644763-b372-499c-e56c-7cda16de1127}">
           <p14:sldIdLst>
             <p14:sldId id="261"/>
             <p14:sldId id="262"/>
             <p14:sldId id="263"/>
           </p14:sldIdLst>
         </p14:section>
-        <p14:section name="확인" id="{43d17a2f-919f-0c8b-7799-0bd511ac4a61}">
+        <p14:section name="확인" id="{e4f61838-b171-aaa5-faa0-74d3348038af}">
           <p14:sldIdLst>
             <p14:sldId id="264"/>
             <p14:sldId id="265"/>
           </p14:sldIdLst>
         </p14:section>
-        <p14:section name="정리" id="{5ebb8970-de98-2316-5236-a471c443fdd9}">
+        <p14:section name="정리" id="{ea529f0d-564a-48da-f247-39b9c4ab8339}">
           <p14:sldIdLst>
             <p14:sldId id="266"/>
           </p14:sldIdLst>
         </p14:section>
-        <p14:section name="보충" id="{b5afe893-b25c-5b17-ce48-690e3c5b5a6c}">
+        <p14:section name="보충" id="{5c4b5303-852b-c384-46fb-775e2111e5cb}">
           <p14:sldIdLst>
             <p14:sldId id="267"/>
           </p14:sldIdLst>
@@ -2605,7 +2605,7 @@
           <a:bodyPr wrap="square" lIns="0" tIns="0" rIns="0" bIns="0" rtlCol="0" anchor="ctr"/>
           <a:lstStyle/>
           <a:p>
-            <a:pPr algn="l" indent="0" marL="0">
+            <a:pPr eaLnBrk="0" algn="l" indent="0" marL="0">
               <a:buNone/>
             </a:pPr>
             <a:r>
@@ -2646,7 +2646,7 @@
           <a:bodyPr wrap="square" lIns="0" tIns="0" rIns="0" bIns="0" rtlCol="0" anchor="t"/>
           <a:lstStyle/>
           <a:p>
-            <a:pPr indent="0" marL="0">
+            <a:pPr eaLnBrk="0" indent="0" marL="0">
               <a:buNone/>
             </a:pPr>
             <a:r>
@@ -2712,7 +2712,7 @@
           <a:bodyPr wrap="square" lIns="0" tIns="0" rIns="0" bIns="0" rtlCol="0" anchor="ctr"/>
           <a:lstStyle/>
           <a:p>
-            <a:pPr indent="0" marL="0">
+            <a:pPr eaLnBrk="0" indent="0" marL="0">
               <a:spcAft>
                 <a:spcPts val="600"/>
               </a:spcAft>
@@ -2732,7 +2732,7 @@
             <a:endParaRPr lang="ko-KR" sz="3000" dirty="0"/>
           </a:p>
           <a:p>
-            <a:pPr indent="0" marL="0">
+            <a:pPr eaLnBrk="0" indent="0" marL="0">
               <a:spcAft>
                 <a:spcPts val="600"/>
               </a:spcAft>
@@ -2752,7 +2752,7 @@
             <a:endParaRPr lang="ko-KR" sz="3000" dirty="0"/>
           </a:p>
           <a:p>
-            <a:pPr indent="0" marL="0">
+            <a:pPr eaLnBrk="0" indent="0" marL="0">
               <a:spcAft>
                 <a:spcPts val="600"/>
               </a:spcAft>
@@ -2821,7 +2821,7 @@
           <a:bodyPr wrap="square" lIns="0" tIns="0" rIns="0" bIns="0" rtlCol="0" anchor="ctr"/>
           <a:lstStyle/>
           <a:p>
-            <a:pPr algn="l" indent="0" marL="0">
+            <a:pPr eaLnBrk="0" algn="l" indent="0" marL="0">
               <a:buNone/>
             </a:pPr>
             <a:r>
@@ -2887,7 +2887,7 @@
           <a:bodyPr wrap="square" lIns="0" tIns="0" rIns="0" bIns="0" rtlCol="0" anchor="ctr"/>
           <a:lstStyle/>
           <a:p>
-            <a:pPr indent="0" marL="0">
+            <a:pPr eaLnBrk="0" indent="0" marL="0">
               <a:spcAft>
                 <a:spcPts val="600"/>
               </a:spcAft>
@@ -2937,7 +2937,7 @@
           <a:bodyPr wrap="square" lIns="0" tIns="0" rIns="0" bIns="0" rtlCol="0" anchor="ctr"/>
           <a:lstStyle/>
           <a:p>
-            <a:pPr algn="ctr" indent="0" marL="0">
+            <a:pPr eaLnBrk="0" algn="ctr" indent="0" marL="0">
               <a:buNone/>
             </a:pPr>
             <a:r>
@@ -3003,7 +3003,7 @@
           <a:bodyPr wrap="square" lIns="0" tIns="0" rIns="0" bIns="0" rtlCol="0" anchor="ctr"/>
           <a:lstStyle/>
           <a:p>
-            <a:pPr indent="0" marL="0">
+            <a:pPr eaLnBrk="0" indent="0" marL="0">
               <a:spcAft>
                 <a:spcPts val="600"/>
               </a:spcAft>
@@ -3053,7 +3053,7 @@
           <a:bodyPr wrap="square" lIns="0" tIns="0" rIns="0" bIns="0" rtlCol="0" anchor="ctr"/>
           <a:lstStyle/>
           <a:p>
-            <a:pPr algn="ctr" indent="0" marL="0">
+            <a:pPr eaLnBrk="0" algn="ctr" indent="0" marL="0">
               <a:buNone/>
             </a:pPr>
             <a:r>
@@ -3119,7 +3119,7 @@
           <a:bodyPr wrap="square" lIns="0" tIns="0" rIns="0" bIns="0" rtlCol="0" anchor="ctr"/>
           <a:lstStyle/>
           <a:p>
-            <a:pPr indent="0" marL="0">
+            <a:pPr eaLnBrk="0" indent="0" marL="0">
               <a:spcAft>
                 <a:spcPts val="600"/>
               </a:spcAft>
@@ -3169,7 +3169,7 @@
           <a:bodyPr wrap="square" lIns="0" tIns="0" rIns="0" bIns="0" rtlCol="0" anchor="ctr"/>
           <a:lstStyle/>
           <a:p>
-            <a:pPr algn="ctr" indent="0" marL="0">
+            <a:pPr eaLnBrk="0" algn="ctr" indent="0" marL="0">
               <a:buNone/>
             </a:pPr>
             <a:r>
@@ -3235,7 +3235,7 @@
           <a:bodyPr wrap="square" lIns="0" tIns="0" rIns="0" bIns="0" rtlCol="0" anchor="ctr"/>
           <a:lstStyle/>
           <a:p>
-            <a:pPr indent="0" marL="0">
+            <a:pPr eaLnBrk="0" indent="0" marL="0">
               <a:spcAft>
                 <a:spcPts val="600"/>
               </a:spcAft>
@@ -3295,7 +3295,7 @@
             </a:lvl1pPr>
           </a:lstStyle>
           <a:p>
-            <a:pPr algn="r"/>
+            <a:pPr eaLnBrk="0" algn="r"/>
             <a:fld id="{F7021451-1387-4CA6-816F-3879F97B5CBC}" type="slidenum">
               <a:rPr b="0" lang="en-US"/>
               <a:t>10</a:t>
@@ -3352,7 +3352,7 @@
           <a:bodyPr wrap="square" lIns="0" tIns="0" rIns="0" bIns="0" rtlCol="0" anchor="ctr"/>
           <a:lstStyle/>
           <a:p>
-            <a:pPr algn="l" indent="0" marL="0">
+            <a:pPr eaLnBrk="0" algn="l" indent="0" marL="0">
               <a:buNone/>
             </a:pPr>
             <a:r>
@@ -3418,7 +3418,7 @@
           <a:bodyPr wrap="square" lIns="0" tIns="0" rIns="0" bIns="0" rtlCol="0" anchor="ctr"/>
           <a:lstStyle/>
           <a:p>
-            <a:pPr indent="0" marL="0">
+            <a:pPr eaLnBrk="0" indent="0" marL="0">
               <a:spcAft>
                 <a:spcPts val="600"/>
               </a:spcAft>
@@ -3468,7 +3468,7 @@
           <a:bodyPr wrap="square" lIns="177800" tIns="0" rIns="177800" bIns="0" rtlCol="0" anchor="ctr"/>
           <a:lstStyle/>
           <a:p>
-            <a:pPr algn="l" indent="0" marL="0">
+            <a:pPr eaLnBrk="0" algn="l" indent="0" marL="0">
               <a:buNone/>
             </a:pPr>
             <a:r>
@@ -3515,7 +3515,7 @@
           <a:bodyPr wrap="square" lIns="177800" tIns="0" rIns="177800" bIns="0" rtlCol="0" anchor="ctr"/>
           <a:lstStyle/>
           <a:p>
-            <a:pPr algn="l" indent="0" marL="0">
+            <a:pPr eaLnBrk="0" algn="l" indent="0" marL="0">
               <a:buNone/>
             </a:pPr>
             <a:r>
@@ -3554,7 +3554,7 @@
           <a:bodyPr wrap="square" lIns="0" tIns="0" rIns="0" bIns="0" rtlCol="0" anchor="t"/>
           <a:lstStyle/>
           <a:p>
-            <a:pPr algn="l" indent="0" marL="0">
+            <a:pPr eaLnBrk="0" algn="l" indent="0" marL="0">
               <a:buNone/>
             </a:pPr>
             <a:r>
@@ -3593,7 +3593,7 @@
           <a:bodyPr wrap="square" lIns="0" tIns="0" rIns="0" bIns="0" rtlCol="0" anchor="ctr"/>
           <a:lstStyle/>
           <a:p>
-            <a:pPr algn="l" indent="0" marL="0">
+            <a:pPr eaLnBrk="0" algn="l" indent="0" marL="0">
               <a:buNone/>
             </a:pPr>
             <a:r>
@@ -3632,7 +3632,7 @@
           <a:bodyPr wrap="square" lIns="0" tIns="0" rIns="0" bIns="0" rtlCol="0" anchor="ctr"/>
           <a:lstStyle/>
           <a:p>
-            <a:pPr algn="l" indent="0" marL="0">
+            <a:pPr eaLnBrk="0" algn="l" indent="0" marL="0">
               <a:buNone/>
             </a:pPr>
             <a:r>
@@ -3671,7 +3671,7 @@
           <a:bodyPr wrap="square" lIns="0" tIns="0" rIns="0" bIns="0" rtlCol="0" anchor="ctr"/>
           <a:lstStyle/>
           <a:p>
-            <a:pPr algn="l" indent="0" marL="0">
+            <a:pPr eaLnBrk="0" algn="l" indent="0" marL="0">
               <a:buNone/>
             </a:pPr>
             <a:r>
@@ -3710,7 +3710,7 @@
           <a:bodyPr wrap="square" lIns="0" tIns="0" rIns="0" bIns="0" rtlCol="0" anchor="ctr"/>
           <a:lstStyle/>
           <a:p>
-            <a:pPr algn="l" indent="0" marL="0">
+            <a:pPr eaLnBrk="0" algn="l" indent="0" marL="0">
               <a:buNone/>
             </a:pPr>
             <a:r>
@@ -3767,7 +3767,7 @@
             </a:lvl1pPr>
           </a:lstStyle>
           <a:p>
-            <a:pPr algn="r"/>
+            <a:pPr eaLnBrk="0" algn="r"/>
             <a:fld id="{F7021451-1387-4CA6-816F-3879F97B5CBC}" type="slidenum">
               <a:rPr b="0" lang="en-US"/>
               <a:t>11</a:t>
@@ -3824,7 +3824,7 @@
           <a:bodyPr wrap="square" lIns="0" tIns="0" rIns="0" bIns="0" rtlCol="0" anchor="ctr"/>
           <a:lstStyle/>
           <a:p>
-            <a:pPr algn="l" indent="0" marL="0">
+            <a:pPr eaLnBrk="0" algn="l" indent="0" marL="0">
               <a:buNone/>
             </a:pPr>
             <a:r>
@@ -3890,7 +3890,7 @@
           <a:bodyPr wrap="square" lIns="0" tIns="0" rIns="0" bIns="0" rtlCol="0" anchor="ctr"/>
           <a:lstStyle/>
           <a:p>
-            <a:pPr indent="0" marL="0">
+            <a:pPr eaLnBrk="0" indent="0" marL="0">
               <a:spcAft>
                 <a:spcPts val="600"/>
               </a:spcAft>
@@ -3959,7 +3959,7 @@
           <a:bodyPr wrap="square" lIns="0" tIns="0" rIns="0" bIns="0" rtlCol="0" anchor="ctr"/>
           <a:lstStyle/>
           <a:p>
-            <a:pPr indent="0" marL="0">
+            <a:pPr eaLnBrk="0" indent="0" marL="0">
               <a:spcAft>
                 <a:spcPts val="600"/>
               </a:spcAft>
@@ -4009,7 +4009,7 @@
           <a:bodyPr wrap="square" lIns="76200" tIns="50800" rIns="76200" bIns="50800" rtlCol="0" anchor="ctr"/>
           <a:lstStyle/>
           <a:p>
-            <a:pPr algn="ctr" indent="0" marL="0">
+            <a:pPr eaLnBrk="0" algn="ctr" indent="0" marL="0">
               <a:buNone/>
             </a:pPr>
             <a:r>
@@ -4026,7 +4026,7 @@
             <a:endParaRPr lang="ko-KR" sz="3400" dirty="0"/>
           </a:p>
           <a:p>
-            <a:pPr algn="ctr" indent="0" marL="0">
+            <a:pPr eaLnBrk="0" algn="ctr" indent="0" marL="0">
               <a:buNone/>
             </a:pPr>
             <a:r>
@@ -4073,7 +4073,7 @@
           <a:bodyPr wrap="square" lIns="76200" tIns="50800" rIns="76200" bIns="50800" rtlCol="0" anchor="ctr"/>
           <a:lstStyle/>
           <a:p>
-            <a:pPr algn="ctr" indent="0" marL="0">
+            <a:pPr eaLnBrk="0" algn="ctr" indent="0" marL="0">
               <a:buNone/>
             </a:pPr>
             <a:r>
@@ -4120,7 +4120,7 @@
           <a:bodyPr wrap="square" lIns="76200" tIns="50800" rIns="76200" bIns="50800" rtlCol="0" anchor="ctr"/>
           <a:lstStyle/>
           <a:p>
-            <a:pPr algn="ctr" indent="0" marL="0">
+            <a:pPr eaLnBrk="0" algn="ctr" indent="0" marL="0">
               <a:buNone/>
             </a:pPr>
             <a:r>
@@ -4167,7 +4167,7 @@
           <a:bodyPr wrap="square" lIns="76200" tIns="50800" rIns="76200" bIns="50800" rtlCol="0" anchor="ctr"/>
           <a:lstStyle/>
           <a:p>
-            <a:pPr algn="ctr" indent="0" marL="0">
+            <a:pPr eaLnBrk="0" algn="ctr" indent="0" marL="0">
               <a:buNone/>
             </a:pPr>
             <a:r>
@@ -4224,7 +4224,7 @@
             </a:lvl1pPr>
           </a:lstStyle>
           <a:p>
-            <a:pPr algn="r"/>
+            <a:pPr eaLnBrk="0" algn="r"/>
             <a:fld id="{F7021451-1387-4CA6-816F-3879F97B5CBC}" type="slidenum">
               <a:rPr b="0" lang="en-US"/>
               <a:t>12</a:t>
@@ -4281,7 +4281,7 @@
           <a:bodyPr wrap="square" lIns="0" tIns="0" rIns="0" bIns="0" rtlCol="0" anchor="ctr"/>
           <a:lstStyle/>
           <a:p>
-            <a:pPr algn="l" indent="0" marL="0">
+            <a:pPr eaLnBrk="0" algn="l" indent="0" marL="0">
               <a:buNone/>
             </a:pPr>
             <a:r>
@@ -4347,7 +4347,7 @@
           <a:bodyPr wrap="square" lIns="0" tIns="0" rIns="0" bIns="0" rtlCol="0" anchor="ctr"/>
           <a:lstStyle/>
           <a:p>
-            <a:pPr indent="0" marL="0">
+            <a:pPr eaLnBrk="0" indent="0" marL="0">
               <a:spcAft>
                 <a:spcPts val="600"/>
               </a:spcAft>
@@ -4416,7 +4416,7 @@
           <a:bodyPr wrap="square" lIns="0" tIns="0" rIns="0" bIns="0" rtlCol="0" anchor="t"/>
           <a:lstStyle/>
           <a:p>
-            <a:pPr indent="0" marL="0">
+            <a:pPr eaLnBrk="0" algn="l" indent="0" marL="0">
               <a:lnSpc>
                 <a:spcPct val="105000"/>
               </a:lnSpc>
@@ -4439,7 +4439,7 @@
             <a:endParaRPr lang="ko-KR" sz="3000" dirty="0"/>
           </a:p>
           <a:p>
-            <a:pPr indent="0" marL="0">
+            <a:pPr eaLnBrk="0" algn="l" indent="0" marL="0">
               <a:lnSpc>
                 <a:spcPct val="105000"/>
               </a:lnSpc>
@@ -4462,7 +4462,7 @@
             <a:endParaRPr lang="ko-KR" sz="3000" dirty="0"/>
           </a:p>
           <a:p>
-            <a:pPr indent="0" marL="0">
+            <a:pPr eaLnBrk="0" algn="l" indent="0" marL="0">
               <a:lnSpc>
                 <a:spcPct val="105000"/>
               </a:lnSpc>
@@ -4485,7 +4485,7 @@
             <a:endParaRPr lang="ko-KR" sz="3000" dirty="0"/>
           </a:p>
           <a:p>
-            <a:pPr indent="0" marL="0">
+            <a:pPr eaLnBrk="0" algn="l" indent="0" marL="0">
               <a:lnSpc>
                 <a:spcPct val="105000"/>
               </a:lnSpc>
@@ -4548,7 +4548,7 @@
             </a:lvl1pPr>
           </a:lstStyle>
           <a:p>
-            <a:pPr algn="r"/>
+            <a:pPr eaLnBrk="0" algn="r"/>
             <a:fld id="{F7021451-1387-4CA6-816F-3879F97B5CBC}" type="slidenum">
               <a:rPr b="0" lang="en-US"/>
               <a:t>2</a:t>
@@ -4605,7 +4605,7 @@
           <a:bodyPr wrap="square" lIns="0" tIns="0" rIns="0" bIns="0" rtlCol="0" anchor="ctr"/>
           <a:lstStyle/>
           <a:p>
-            <a:pPr algn="l" indent="0" marL="0">
+            <a:pPr eaLnBrk="0" algn="l" indent="0" marL="0">
               <a:buNone/>
             </a:pPr>
             <a:r>
@@ -4671,7 +4671,7 @@
           <a:bodyPr wrap="square" lIns="0" tIns="0" rIns="0" bIns="0" rtlCol="0" anchor="ctr"/>
           <a:lstStyle/>
           <a:p>
-            <a:pPr indent="0" marL="0">
+            <a:pPr eaLnBrk="0" indent="0" marL="0">
               <a:spcAft>
                 <a:spcPts val="600"/>
               </a:spcAft>
@@ -4740,7 +4740,7 @@
           <a:bodyPr wrap="square" lIns="0" tIns="0" rIns="0" bIns="0" rtlCol="0" anchor="ctr"/>
           <a:lstStyle/>
           <a:p>
-            <a:pPr indent="0" marL="0">
+            <a:pPr eaLnBrk="0" indent="0" marL="0">
               <a:spcAft>
                 <a:spcPts val="600"/>
               </a:spcAft>
@@ -4760,7 +4760,7 @@
             <a:endParaRPr lang="ko-KR" sz="3000" dirty="0"/>
           </a:p>
           <a:p>
-            <a:pPr indent="0" marL="0">
+            <a:pPr eaLnBrk="0" indent="0" marL="0">
               <a:spcAft>
                 <a:spcPts val="600"/>
               </a:spcAft>
@@ -4829,7 +4829,7 @@
           <a:bodyPr wrap="square" lIns="0" tIns="0" rIns="0" bIns="0" rtlCol="0" anchor="ctr"/>
           <a:lstStyle/>
           <a:p>
-            <a:pPr indent="0" marL="0">
+            <a:pPr eaLnBrk="0" indent="0" marL="0">
               <a:spcAft>
                 <a:spcPts val="600"/>
               </a:spcAft>
@@ -4849,7 +4849,7 @@
             <a:endParaRPr lang="ko-KR" sz="3000" dirty="0"/>
           </a:p>
           <a:p>
-            <a:pPr indent="0" marL="0">
+            <a:pPr eaLnBrk="0" indent="0" marL="0">
               <a:spcAft>
                 <a:spcPts val="600"/>
               </a:spcAft>
@@ -4918,7 +4918,7 @@
           <a:bodyPr wrap="square" lIns="0" tIns="0" rIns="0" bIns="0" rtlCol="0" anchor="ctr"/>
           <a:lstStyle/>
           <a:p>
-            <a:pPr indent="0" marL="0">
+            <a:pPr eaLnBrk="0" indent="0" marL="0">
               <a:spcAft>
                 <a:spcPts val="600"/>
               </a:spcAft>
@@ -4938,7 +4938,7 @@
             <a:endParaRPr lang="ko-KR" sz="3000" dirty="0"/>
           </a:p>
           <a:p>
-            <a:pPr indent="0" marL="0">
+            <a:pPr eaLnBrk="0" indent="0" marL="0">
               <a:spcAft>
                 <a:spcPts val="600"/>
               </a:spcAft>
@@ -4998,7 +4998,7 @@
             </a:lvl1pPr>
           </a:lstStyle>
           <a:p>
-            <a:pPr algn="r"/>
+            <a:pPr eaLnBrk="0" algn="r"/>
             <a:fld id="{F7021451-1387-4CA6-816F-3879F97B5CBC}" type="slidenum">
               <a:rPr b="0" lang="en-US"/>
               <a:t>3</a:t>
@@ -5055,7 +5055,7 @@
           <a:bodyPr wrap="square" lIns="0" tIns="0" rIns="0" bIns="0" rtlCol="0" anchor="ctr"/>
           <a:lstStyle/>
           <a:p>
-            <a:pPr algn="l" indent="0" marL="0">
+            <a:pPr eaLnBrk="0" algn="l" indent="0" marL="0">
               <a:buNone/>
             </a:pPr>
             <a:r>
@@ -5121,7 +5121,7 @@
           <a:bodyPr wrap="square" lIns="0" tIns="0" rIns="0" bIns="0" rtlCol="0" anchor="ctr"/>
           <a:lstStyle/>
           <a:p>
-            <a:pPr indent="0" marL="0">
+            <a:pPr eaLnBrk="0" indent="0" marL="0">
               <a:spcAft>
                 <a:spcPts val="600"/>
               </a:spcAft>
@@ -5190,7 +5190,7 @@
           <a:bodyPr wrap="square" lIns="0" tIns="0" rIns="0" bIns="0" rtlCol="0" anchor="t"/>
           <a:lstStyle/>
           <a:p>
-            <a:pPr indent="0" marL="0">
+            <a:pPr eaLnBrk="0" algn="l" indent="0" marL="0">
               <a:lnSpc>
                 <a:spcPct val="105000"/>
               </a:lnSpc>
@@ -5253,7 +5253,7 @@
             </a:lvl1pPr>
           </a:lstStyle>
           <a:p>
-            <a:pPr algn="r"/>
+            <a:pPr eaLnBrk="0" algn="r"/>
             <a:fld id="{F7021451-1387-4CA6-816F-3879F97B5CBC}" type="slidenum">
               <a:rPr b="0" lang="en-US"/>
               <a:t>4</a:t>
@@ -5310,7 +5310,7 @@
           <a:bodyPr wrap="square" lIns="0" tIns="0" rIns="0" bIns="0" rtlCol="0" anchor="ctr"/>
           <a:lstStyle/>
           <a:p>
-            <a:pPr algn="l" indent="0" marL="0">
+            <a:pPr eaLnBrk="0" algn="l" indent="0" marL="0">
               <a:buNone/>
             </a:pPr>
             <a:r>
@@ -5376,7 +5376,7 @@
           <a:bodyPr wrap="square" lIns="0" tIns="0" rIns="0" bIns="0" rtlCol="0" anchor="ctr"/>
           <a:lstStyle/>
           <a:p>
-            <a:pPr indent="0" marL="0">
+            <a:pPr eaLnBrk="0" indent="0" marL="0">
               <a:spcAft>
                 <a:spcPts val="600"/>
               </a:spcAft>
@@ -5445,7 +5445,7 @@
           <a:bodyPr wrap="square" lIns="0" tIns="0" rIns="0" bIns="0" rtlCol="0" anchor="ctr"/>
           <a:lstStyle/>
           <a:p>
-            <a:pPr indent="0" marL="0">
+            <a:pPr eaLnBrk="0" indent="0" marL="0">
               <a:spcAft>
                 <a:spcPts val="600"/>
               </a:spcAft>
@@ -5465,7 +5465,7 @@
             <a:endParaRPr lang="ko-KR" sz="3000" dirty="0"/>
           </a:p>
           <a:p>
-            <a:pPr indent="0" marL="0">
+            <a:pPr eaLnBrk="0" indent="0" marL="0">
               <a:spcAft>
                 <a:spcPts val="600"/>
               </a:spcAft>
@@ -5534,7 +5534,7 @@
           <a:bodyPr wrap="square" lIns="0" tIns="0" rIns="0" bIns="0" rtlCol="0" anchor="ctr"/>
           <a:lstStyle/>
           <a:p>
-            <a:pPr indent="0" marL="0">
+            <a:pPr eaLnBrk="0" indent="0" marL="0">
               <a:spcAft>
                 <a:spcPts val="600"/>
               </a:spcAft>
@@ -5554,7 +5554,7 @@
             <a:endParaRPr lang="ko-KR" sz="3000" dirty="0"/>
           </a:p>
           <a:p>
-            <a:pPr indent="0" marL="0">
+            <a:pPr eaLnBrk="0" indent="0" marL="0">
               <a:spcAft>
                 <a:spcPts val="600"/>
               </a:spcAft>
@@ -5623,7 +5623,7 @@
           <a:bodyPr wrap="square" lIns="0" tIns="0" rIns="0" bIns="0" rtlCol="0" anchor="ctr"/>
           <a:lstStyle/>
           <a:p>
-            <a:pPr indent="0" marL="0">
+            <a:pPr eaLnBrk="0" indent="0" marL="0">
               <a:spcAft>
                 <a:spcPts val="600"/>
               </a:spcAft>
@@ -5643,7 +5643,7 @@
             <a:endParaRPr lang="ko-KR" sz="3000" dirty="0"/>
           </a:p>
           <a:p>
-            <a:pPr indent="0" marL="0">
+            <a:pPr eaLnBrk="0" indent="0" marL="0">
               <a:spcAft>
                 <a:spcPts val="600"/>
               </a:spcAft>
@@ -5712,7 +5712,7 @@
           <a:bodyPr wrap="square" lIns="0" tIns="0" rIns="0" bIns="0" rtlCol="0" anchor="ctr"/>
           <a:lstStyle/>
           <a:p>
-            <a:pPr indent="0" marL="0">
+            <a:pPr eaLnBrk="0" indent="0" marL="0">
               <a:spcAft>
                 <a:spcPts val="600"/>
               </a:spcAft>
@@ -5732,7 +5732,7 @@
             <a:endParaRPr lang="ko-KR" sz="3000" dirty="0"/>
           </a:p>
           <a:p>
-            <a:pPr indent="0" marL="0">
+            <a:pPr eaLnBrk="0" indent="0" marL="0">
               <a:spcAft>
                 <a:spcPts val="600"/>
               </a:spcAft>
@@ -5792,7 +5792,7 @@
             </a:lvl1pPr>
           </a:lstStyle>
           <a:p>
-            <a:pPr algn="r"/>
+            <a:pPr eaLnBrk="0" algn="r"/>
             <a:fld id="{F7021451-1387-4CA6-816F-3879F97B5CBC}" type="slidenum">
               <a:rPr b="0" lang="en-US"/>
               <a:t>5</a:t>
@@ -5849,7 +5849,7 @@
           <a:bodyPr wrap="square" lIns="0" tIns="0" rIns="0" bIns="0" rtlCol="0" anchor="ctr"/>
           <a:lstStyle/>
           <a:p>
-            <a:pPr algn="l" indent="0" marL="0">
+            <a:pPr eaLnBrk="0" algn="l" indent="0" marL="0">
               <a:buNone/>
             </a:pPr>
             <a:r>
@@ -5915,7 +5915,7 @@
           <a:bodyPr wrap="square" lIns="0" tIns="0" rIns="0" bIns="0" rtlCol="0" anchor="ctr"/>
           <a:lstStyle/>
           <a:p>
-            <a:pPr indent="0" marL="0">
+            <a:pPr eaLnBrk="0" indent="0" marL="0">
               <a:spcAft>
                 <a:spcPts val="600"/>
               </a:spcAft>
@@ -5984,7 +5984,7 @@
           <a:bodyPr wrap="square" lIns="0" tIns="0" rIns="0" bIns="0" rtlCol="0" anchor="t"/>
           <a:lstStyle/>
           <a:p>
-            <a:pPr indent="0" marL="0">
+            <a:pPr eaLnBrk="0" algn="l" indent="0" marL="0">
               <a:lnSpc>
                 <a:spcPct val="105000"/>
               </a:lnSpc>
@@ -6047,7 +6047,7 @@
             </a:lvl1pPr>
           </a:lstStyle>
           <a:p>
-            <a:pPr algn="r"/>
+            <a:pPr eaLnBrk="0" algn="r"/>
             <a:fld id="{F7021451-1387-4CA6-816F-3879F97B5CBC}" type="slidenum">
               <a:rPr b="0" lang="en-US"/>
               <a:t>6</a:t>
@@ -6104,7 +6104,7 @@
           <a:bodyPr wrap="square" lIns="0" tIns="0" rIns="0" bIns="0" rtlCol="0" anchor="ctr"/>
           <a:lstStyle/>
           <a:p>
-            <a:pPr algn="l" indent="0" marL="0">
+            <a:pPr eaLnBrk="0" algn="l" indent="0" marL="0">
               <a:buNone/>
             </a:pPr>
             <a:r>
@@ -6170,7 +6170,7 @@
           <a:bodyPr wrap="square" lIns="0" tIns="0" rIns="0" bIns="0" rtlCol="0" anchor="ctr"/>
           <a:lstStyle/>
           <a:p>
-            <a:pPr indent="0" marL="0">
+            <a:pPr eaLnBrk="0" indent="0" marL="0">
               <a:spcAft>
                 <a:spcPts val="600"/>
               </a:spcAft>
@@ -6239,7 +6239,7 @@
           <a:bodyPr wrap="square" lIns="0" tIns="0" rIns="0" bIns="0" rtlCol="0" anchor="ctr"/>
           <a:lstStyle/>
           <a:p>
-            <a:pPr indent="0" marL="0">
+            <a:pPr eaLnBrk="0" indent="0" marL="0">
               <a:spcAft>
                 <a:spcPts val="600"/>
               </a:spcAft>
@@ -6289,7 +6289,7 @@
           <a:bodyPr wrap="square" lIns="177800" tIns="0" rIns="177800" bIns="0" rtlCol="0" anchor="ctr"/>
           <a:lstStyle/>
           <a:p>
-            <a:pPr algn="l" indent="0" marL="0">
+            <a:pPr eaLnBrk="0" algn="l" indent="0" marL="0">
               <a:buNone/>
             </a:pPr>
             <a:r>
@@ -6328,7 +6328,7 @@
           <a:bodyPr wrap="square" lIns="0" tIns="0" rIns="0" bIns="0" rtlCol="0" anchor="t"/>
           <a:lstStyle/>
           <a:p>
-            <a:pPr algn="l" indent="0" marL="0">
+            <a:pPr eaLnBrk="0" algn="l" indent="0" marL="0">
               <a:buNone/>
             </a:pPr>
             <a:r>
@@ -6375,7 +6375,7 @@
           <a:bodyPr wrap="square" lIns="177800" tIns="0" rIns="177800" bIns="0" rtlCol="0" anchor="ctr"/>
           <a:lstStyle/>
           <a:p>
-            <a:pPr algn="l" indent="0" marL="0">
+            <a:pPr eaLnBrk="0" algn="l" indent="0" marL="0">
               <a:buNone/>
             </a:pPr>
             <a:r>
@@ -6414,7 +6414,7 @@
           <a:bodyPr wrap="square" lIns="0" tIns="0" rIns="0" bIns="0" rtlCol="0" anchor="t"/>
           <a:lstStyle/>
           <a:p>
-            <a:pPr algn="l" indent="0" marL="0">
+            <a:pPr eaLnBrk="0" algn="l" indent="0" marL="0">
               <a:buNone/>
             </a:pPr>
             <a:r>
@@ -6471,7 +6471,7 @@
             </a:lvl1pPr>
           </a:lstStyle>
           <a:p>
-            <a:pPr algn="r"/>
+            <a:pPr eaLnBrk="0" algn="r"/>
             <a:fld id="{F7021451-1387-4CA6-816F-3879F97B5CBC}" type="slidenum">
               <a:rPr b="0" lang="en-US"/>
               <a:t>7</a:t>
@@ -6528,7 +6528,7 @@
           <a:bodyPr wrap="square" lIns="0" tIns="0" rIns="0" bIns="0" rtlCol="0" anchor="ctr"/>
           <a:lstStyle/>
           <a:p>
-            <a:pPr algn="l" indent="0" marL="0">
+            <a:pPr eaLnBrk="0" algn="l" indent="0" marL="0">
               <a:buNone/>
             </a:pPr>
             <a:r>
@@ -6573,7 +6573,7 @@
           <a:bodyPr wrap="square" lIns="0" tIns="0" rIns="0" bIns="0" rtlCol="0" anchor="ctr"/>
           <a:lstStyle/>
           <a:p>
-            <a:pPr algn="ctr" indent="0" marL="0">
+            <a:pPr eaLnBrk="0" algn="ctr" indent="0" marL="0">
               <a:buNone/>
             </a:pPr>
             <a:r>
@@ -6612,7 +6612,7 @@
           <a:bodyPr wrap="square" lIns="0" tIns="0" rIns="0" bIns="0" rtlCol="0" anchor="t"/>
           <a:lstStyle/>
           <a:p>
-            <a:pPr algn="l" indent="0" marL="0">
+            <a:pPr eaLnBrk="0" algn="l" indent="0" marL="0">
               <a:buNone/>
             </a:pPr>
             <a:r>
@@ -6657,7 +6657,7 @@
           <a:bodyPr wrap="square" lIns="0" tIns="0" rIns="0" bIns="0" rtlCol="0" anchor="ctr"/>
           <a:lstStyle/>
           <a:p>
-            <a:pPr algn="ctr" indent="0" marL="0">
+            <a:pPr eaLnBrk="0" algn="ctr" indent="0" marL="0">
               <a:buNone/>
             </a:pPr>
             <a:r>
@@ -6696,7 +6696,7 @@
           <a:bodyPr wrap="square" lIns="0" tIns="0" rIns="0" bIns="0" rtlCol="0" anchor="t"/>
           <a:lstStyle/>
           <a:p>
-            <a:pPr algn="l" indent="0" marL="0">
+            <a:pPr eaLnBrk="0" algn="l" indent="0" marL="0">
               <a:buNone/>
             </a:pPr>
             <a:r>
@@ -6741,7 +6741,7 @@
           <a:bodyPr wrap="square" lIns="0" tIns="0" rIns="0" bIns="0" rtlCol="0" anchor="ctr"/>
           <a:lstStyle/>
           <a:p>
-            <a:pPr algn="ctr" indent="0" marL="0">
+            <a:pPr eaLnBrk="0" algn="ctr" indent="0" marL="0">
               <a:buNone/>
             </a:pPr>
             <a:r>
@@ -6780,7 +6780,7 @@
           <a:bodyPr wrap="square" lIns="0" tIns="0" rIns="0" bIns="0" rtlCol="0" anchor="t"/>
           <a:lstStyle/>
           <a:p>
-            <a:pPr algn="l" indent="0" marL="0">
+            <a:pPr eaLnBrk="0" algn="l" indent="0" marL="0">
               <a:buNone/>
             </a:pPr>
             <a:r>
@@ -6825,7 +6825,7 @@
           <a:bodyPr wrap="square" lIns="0" tIns="0" rIns="0" bIns="0" rtlCol="0" anchor="ctr"/>
           <a:lstStyle/>
           <a:p>
-            <a:pPr algn="ctr" indent="0" marL="0">
+            <a:pPr eaLnBrk="0" algn="ctr" indent="0" marL="0">
               <a:buNone/>
             </a:pPr>
             <a:r>
@@ -6864,7 +6864,7 @@
           <a:bodyPr wrap="square" lIns="0" tIns="0" rIns="0" bIns="0" rtlCol="0" anchor="t"/>
           <a:lstStyle/>
           <a:p>
-            <a:pPr algn="l" indent="0" marL="0">
+            <a:pPr eaLnBrk="0" algn="l" indent="0" marL="0">
               <a:buNone/>
             </a:pPr>
             <a:r>
@@ -6921,7 +6921,7 @@
             </a:lvl1pPr>
           </a:lstStyle>
           <a:p>
-            <a:pPr algn="r"/>
+            <a:pPr eaLnBrk="0" algn="r"/>
             <a:fld id="{F7021451-1387-4CA6-816F-3879F97B5CBC}" type="slidenum">
               <a:rPr b="0" lang="en-US"/>
               <a:t>8</a:t>
@@ -6978,7 +6978,7 @@
           <a:bodyPr wrap="square" lIns="0" tIns="0" rIns="0" bIns="0" rtlCol="0" anchor="ctr"/>
           <a:lstStyle/>
           <a:p>
-            <a:pPr algn="l" indent="0" marL="0">
+            <a:pPr eaLnBrk="0" algn="l" indent="0" marL="0">
               <a:buNone/>
             </a:pPr>
             <a:r>
@@ -7044,7 +7044,7 @@
           <a:bodyPr wrap="square" lIns="0" tIns="0" rIns="0" bIns="0" rtlCol="0" anchor="ctr"/>
           <a:lstStyle/>
           <a:p>
-            <a:pPr indent="0" marL="0">
+            <a:pPr eaLnBrk="0" indent="0" marL="0">
               <a:spcAft>
                 <a:spcPts val="600"/>
               </a:spcAft>
@@ -7113,7 +7113,7 @@
           <a:bodyPr wrap="square" lIns="0" tIns="0" rIns="0" bIns="0" rtlCol="0" anchor="t"/>
           <a:lstStyle/>
           <a:p>
-            <a:pPr indent="0" marL="0">
+            <a:pPr eaLnBrk="0" algn="l" indent="0" marL="0">
               <a:lnSpc>
                 <a:spcPct val="105000"/>
               </a:lnSpc>
@@ -7176,7 +7176,7 @@
             </a:lvl1pPr>
           </a:lstStyle>
           <a:p>
-            <a:pPr algn="r"/>
+            <a:pPr eaLnBrk="0" algn="r"/>
             <a:fld id="{F7021451-1387-4CA6-816F-3879F97B5CBC}" type="slidenum">
               <a:rPr b="0" lang="en-US"/>
               <a:t>9</a:t>

--- a/dist/초3/국어/읽기와어휘/초3_국어_읽기와어휘_01_문단의중심문장_학생용.pptx
+++ b/dist/초3/국어/읽기와어휘/초3_국어_읽기와어휘_01_문단의중심문장_학생용.pptx
@@ -118,38 +118,38 @@
   <p:extLst>
     <p:ext uri="{521415D9-36F7-43E2-AB2F-B90AF26B5E84}">
       <p14:sectionLst xmlns:p14="http://schemas.microsoft.com/office/powerpoint/2010/main">
-        <p14:section name="도입" id="{7570f434-a0b9-2eac-727f-864903b6e9ff}">
+        <p14:section name="도입" id="{5f30f014-b2ea-7dff-ced5-79bc07223cfb}">
           <p14:sldIdLst>
             <p14:sldId id="256"/>
             <p14:sldId id="257"/>
           </p14:sldIdLst>
         </p14:section>
-        <p14:section name="개념" id="{e20d0d5f-3fb4-2db0-9197-50038d768137}">
+        <p14:section name="개념" id="{c6793b6f-d19b-8eff-cc48-e74e25934da5}">
           <p14:sldIdLst>
             <p14:sldId id="258"/>
             <p14:sldId id="259"/>
             <p14:sldId id="260"/>
           </p14:sldIdLst>
         </p14:section>
-        <p14:section name="연습" id="{ce644763-b372-499c-e56c-7cda16de1127}">
+        <p14:section name="연습" id="{78d62c5e-0c74-e265-22fc-686e691b19df}">
           <p14:sldIdLst>
             <p14:sldId id="261"/>
             <p14:sldId id="262"/>
             <p14:sldId id="263"/>
           </p14:sldIdLst>
         </p14:section>
-        <p14:section name="확인" id="{e4f61838-b171-aaa5-faa0-74d3348038af}">
+        <p14:section name="확인" id="{88523a32-cde4-ea7e-cb61-d9f4ab6598fe}">
           <p14:sldIdLst>
             <p14:sldId id="264"/>
             <p14:sldId id="265"/>
           </p14:sldIdLst>
         </p14:section>
-        <p14:section name="정리" id="{ea529f0d-564a-48da-f247-39b9c4ab8339}">
+        <p14:section name="정리" id="{a395ab7b-eb64-8844-c9be-c2dc19e9b80a}">
           <p14:sldIdLst>
             <p14:sldId id="266"/>
           </p14:sldIdLst>
         </p14:section>
-        <p14:section name="보충" id="{5c4b5303-852b-c384-46fb-775e2111e5cb}">
+        <p14:section name="보충" id="{254dee38-1ad0-72b1-64fb-90d9dec17817}">
           <p14:sldIdLst>
             <p14:sldId id="267"/>
           </p14:sldIdLst>
@@ -5875,12 +5875,12 @@
         </p:nvSpPr>
         <p:spPr>
           <a:xfrm>
-            <a:off x="548640" y="5349240"/>
-            <a:ext cx="11091672" cy="868680"/>
+            <a:off x="548640" y="4959096"/>
+            <a:ext cx="11091672" cy="1258824"/>
           </a:xfrm>
           <a:prstGeom prst="roundRect">
             <a:avLst>
-              <a:gd name="adj" fmla="val 12632"/>
+              <a:gd name="adj" fmla="val 8717"/>
             </a:avLst>
           </a:prstGeom>
           <a:solidFill>
@@ -5902,8 +5902,8 @@
         </p:nvSpPr>
         <p:spPr>
           <a:xfrm>
-            <a:off x="822960" y="5486400"/>
-            <a:ext cx="10543032" cy="594360"/>
+            <a:off x="822960" y="5096256"/>
+            <a:ext cx="10543032" cy="984504"/>
           </a:xfrm>
           <a:prstGeom prst="rect">
             <a:avLst/>
@@ -5945,11 +5945,11 @@
         <p:spPr>
           <a:xfrm>
             <a:off x="548640" y="1325880"/>
-            <a:ext cx="11091672" cy="3794760"/>
+            <a:ext cx="11091672" cy="3404616"/>
           </a:xfrm>
           <a:prstGeom prst="roundRect">
             <a:avLst>
-              <a:gd name="adj" fmla="val 2410"/>
+              <a:gd name="adj" fmla="val 2686"/>
             </a:avLst>
           </a:prstGeom>
           <a:solidFill>
@@ -5972,7 +5972,7 @@
         <p:spPr>
           <a:xfrm>
             <a:off x="822960" y="1508760"/>
-            <a:ext cx="10543032" cy="3429000"/>
+            <a:ext cx="10543032" cy="3038856"/>
           </a:xfrm>
           <a:prstGeom prst="rect">
             <a:avLst/>
